--- a/Никитин (1).pptx
+++ b/Никитин (1).pptx
@@ -1470,18 +1470,7 @@
                 <a:ea typeface="Calibri" pitchFamily="34" charset="-122"/>
                 <a:cs typeface="Calibri" pitchFamily="34" charset="-120"/>
               </a:rPr>
-              <a:t>Дипломная </a:t>
-            </a:r>
-            <a:r>
-              <a:rPr lang="en-US" sz="1500" b="1" dirty="0" err="1">
-                <a:solidFill>
-                  <a:srgbClr val="0EA5E9"/>
-                </a:solidFill>
-                <a:latin typeface="Calibri" pitchFamily="34" charset="0"/>
-                <a:ea typeface="Calibri" pitchFamily="34" charset="-122"/>
-                <a:cs typeface="Calibri" pitchFamily="34" charset="-120"/>
-              </a:rPr>
-              <a:t>работа</a:t>
+              <a:t>Дипломный проект </a:t>
             </a:r>
             <a:endParaRPr lang="en-US" sz="1500" dirty="0"/>
           </a:p>
@@ -2445,7 +2434,40 @@
                 <a:ea typeface="Cambria" pitchFamily="34" charset="-122"/>
                 <a:cs typeface="Cambria" pitchFamily="34" charset="-120"/>
               </a:rPr>
-              <a:t>Цель и задачи работы</a:t>
+              <a:t>Цель и </a:t>
+            </a:r>
+            <a:r>
+              <a:rPr lang="en-US" sz="3000" b="1" dirty="0" err="1">
+                <a:solidFill>
+                  <a:srgbClr val="1E293B"/>
+                </a:solidFill>
+                <a:latin typeface="Cambria" pitchFamily="34" charset="0"/>
+                <a:ea typeface="Cambria" pitchFamily="34" charset="-122"/>
+                <a:cs typeface="Cambria" pitchFamily="34" charset="-120"/>
+              </a:rPr>
+              <a:t>задачи</a:t>
+            </a:r>
+            <a:r>
+              <a:rPr lang="en-US" sz="3000" b="1" dirty="0">
+                <a:solidFill>
+                  <a:srgbClr val="1E293B"/>
+                </a:solidFill>
+                <a:latin typeface="Cambria" pitchFamily="34" charset="0"/>
+                <a:ea typeface="Cambria" pitchFamily="34" charset="-122"/>
+                <a:cs typeface="Cambria" pitchFamily="34" charset="-120"/>
+              </a:rPr>
+              <a:t> </a:t>
+            </a:r>
+            <a:r>
+              <a:rPr lang="ru-RU" sz="3000" b="1" dirty="0">
+                <a:solidFill>
+                  <a:srgbClr val="1E293B"/>
+                </a:solidFill>
+                <a:latin typeface="Cambria" pitchFamily="34" charset="0"/>
+                <a:ea typeface="Cambria" pitchFamily="34" charset="-122"/>
+                <a:cs typeface="Cambria" pitchFamily="34" charset="-120"/>
+              </a:rPr>
+              <a:t>проекта </a:t>
             </a:r>
             <a:endParaRPr lang="en-US" sz="3000" dirty="0"/>
           </a:p>
@@ -4987,15 +5009,14 @@
               <a:buNone/>
             </a:pPr>
             <a:r>
-              <a:rPr lang="en-US" sz="1400" b="1" dirty="0">
+              <a:rPr lang="ru-RU" sz="1400" b="1" dirty="0">
                 <a:solidFill>
                   <a:srgbClr val="1E293B"/>
                 </a:solidFill>
                 <a:latin typeface="Cambria" pitchFamily="34" charset="0"/>
                 <a:ea typeface="Cambria" pitchFamily="34" charset="-122"/>
-                <a:cs typeface="Cambria" pitchFamily="34" charset="-120"/>
-              </a:rPr>
-              <a:t>Критические события и уведомления</a:t>
+              </a:rPr>
+              <a:t>Строки инвентаризации</a:t>
             </a:r>
             <a:endParaRPr lang="en-US" sz="1400" dirty="0"/>
           </a:p>
